--- a/1-TicTacToe/tic_tac_toe.pptx
+++ b/1-TicTacToe/tic_tac_toe.pptx
@@ -2487,50 +2487,24 @@
                   <a:srgbClr val="64748B"/>
                 </a:solidFill>
               </a:rPr>
-              <a:t>A small game built with arrays, input, rules, and drawing.</a:t>
-            </a:r>
-          </a:p>
-        </p:txBody>
-      </p:sp>
-      <p:sp>
-        <p:nvSpPr>
-          <p:cNvPr id="10" name="矩形: 圓角 9">
-            <a:extLst>
-              <a:ext uri="{FF2B5EF4-FFF2-40B4-BE49-F238E27FC236}">
-                <a16:creationId xmlns:a16="http://schemas.microsoft.com/office/drawing/2014/main" id="{37EFF9FA-6745-4618-BA6C-25946DAD4561}"/>
-              </a:ext>
-            </a:extLst>
-          </p:cNvPr>
-          <p:cNvSpPr>
-            <a:spLocks noGrp="1"/>
-          </p:cNvSpPr>
-          <p:nvPr/>
-        </p:nvSpPr>
-        <p:spPr>
-          <a:xfrm>
-            <a:off x="6229350" y="1690255"/>
-            <a:ext cx="5276850" cy="3047999"/>
-          </a:xfrm>
-          <a:prstGeom prst="roundRect">
-            <a:avLst>
-              <a:gd name="adj" fmla="val 1754"/>
-            </a:avLst>
-          </a:prstGeom>
-          <a:solidFill>
-            <a:srgbClr val="F1F5F9"/>
-          </a:solidFill>
-          <a:ln w="9525">
-            <a:solidFill>
-              <a:srgbClr val="CBD5E1"/>
-            </a:solidFill>
-            <a:prstDash val="solid"/>
-          </a:ln>
-        </p:spPr>
-        <p:txBody>
-          <a:bodyPr/>
-          <a:lstStyle/>
-          <a:p>
-            <a:endParaRPr/>
+              <a:t>A small game built </a:t>
+            </a:r>
+            <a:r>
+              <a:rPr lang="en-US" altLang="zh-CN" dirty="0">
+                <a:solidFill>
+                  <a:srgbClr val="64748B"/>
+                </a:solidFill>
+              </a:rPr>
+              <a:t>based of</a:t>
+            </a:r>
+            <a:r>
+              <a:rPr sz="1800" dirty="0">
+                <a:solidFill>
+                  <a:srgbClr val="64748B"/>
+                </a:solidFill>
+              </a:rPr>
+              <a:t> arrays</a:t>
+            </a:r>
           </a:p>
         </p:txBody>
       </p:sp>
@@ -2701,7 +2675,7 @@
         <p:spPr>
           <a:xfrm>
             <a:off x="685800" y="3714750"/>
-            <a:ext cx="4762500" cy="2000250"/>
+            <a:ext cx="4438650" cy="1679286"/>
           </a:xfrm>
           <a:prstGeom prst="roundRect">
             <a:avLst>
@@ -2769,7 +2743,7 @@
               </a:defRPr>
             </a:pPr>
             <a:r>
-              <a:rPr sz="1350" b="1">
+              <a:rPr sz="1350" b="1" dirty="0">
                 <a:solidFill>
                   <a:srgbClr val="172033"/>
                 </a:solidFill>
@@ -13593,7 +13567,7 @@
               </a:defRPr>
             </a:pPr>
             <a:r>
-              <a:rPr sz="4050" b="1">
+              <a:rPr sz="4050" b="1" dirty="0">
                 <a:solidFill>
                   <a:srgbClr val="14213D"/>
                 </a:solidFill>
@@ -13644,7 +13618,7 @@
               </a:defRPr>
             </a:pPr>
             <a:r>
-              <a:rPr sz="1800">
+              <a:rPr sz="1800" dirty="0">
                 <a:solidFill>
                   <a:srgbClr val="64748B"/>
                 </a:solidFill>
